--- a/abbildungen/kap2/Phasen_des_Planungs-_und_Steuerungsprozesses.pptx
+++ b/abbildungen/kap2/Phasen_des_Planungs-_und_Steuerungsprozesses.pptx
@@ -7,7 +7,7 @@
   <p:sldIdLst>
     <p:sldId id="256" r:id="rId7"/>
   </p:sldIdLst>
-  <p:sldSz cx="3960000" cy="3103200" type="screen4x3"/>
+  <p:sldSz cx="3960000" cy="3081600" type="screen4x3"/>
   <p:notesSz cx="6858000" cy="9144000"/>
   <p:defaultTextStyle>
     <a:defPPr>
@@ -3090,27 +3090,22 @@
       <p:grpSpPr/>
       <p:sp>
         <p:nvSpPr>
-          <p:cNvPr id="2" name="Rectangle 1"/>
-          <p:cNvSpPr/>
+          <p:cNvPr id="2" name="Kopf Phasen"/>
+          <p:cNvSpPr txBox="1"/>
           <p:nvPr/>
         </p:nvSpPr>
         <p:spPr>
           <a:xfrm>
-            <a:off x="360000" y="216000"/>
-            <a:ext cx="1008000" cy="357906"/>
+            <a:off x="360000" y="180000"/>
+            <a:ext cx="1008000" cy="314706"/>
           </a:xfrm>
           <a:prstGeom prst="rect">
             <a:avLst/>
           </a:prstGeom>
-          <a:solidFill>
-            <a:srgbClr val="3A3F44"/>
-          </a:solidFill>
-          <a:ln>
-            <a:noFill/>
-          </a:ln>
-        </p:spPr>
-        <p:txBody>
-          <a:bodyPr rtlCol="0" anchor="ctr" lIns="32400" rIns="32400" tIns="21600" bIns="21600" wrap="square">
+          <a:noFill/>
+        </p:spPr>
+        <p:txBody>
+          <a:bodyPr wrap="square" lIns="32400" rIns="32400" tIns="0" bIns="0" anchor="b">
             <a:noAutofit/>
           </a:bodyPr>
           <a:lstStyle/>
@@ -3122,27 +3117,27 @@
               <a:buNone/>
             </a:pPr>
             <a:r>
-              <a:rPr lang="de-DE" sz="700" b="1" i="0">
-                <a:solidFill>
-                  <a:srgbClr val="FFFFFF"/>
+              <a:rPr lang="de-DE" sz="700" b="0" i="1">
+                <a:solidFill>
+                  <a:srgbClr val="1A1A1A"/>
                 </a:solidFill>
                 <a:latin typeface="Arial"/>
               </a:rPr>
               <a:t>Phasen des</a:t>
             </a:r>
             <a:br>
-              <a:rPr lang="de-DE" sz="700" b="1" i="0">
-                <a:solidFill>
-                  <a:srgbClr val="FFFFFF"/>
+              <a:rPr lang="de-DE" sz="700" b="0" i="1">
+                <a:solidFill>
+                  <a:srgbClr val="1A1A1A"/>
                 </a:solidFill>
                 <a:latin typeface="Arial"/>
                 <a:cs typeface="Arial"/>
               </a:rPr>
             </a:br>
             <a:r>
-              <a:rPr lang="de-DE" sz="700" b="1" i="0">
-                <a:solidFill>
-                  <a:srgbClr val="FFFFFF"/>
+              <a:rPr lang="de-DE" sz="700" b="0" i="1">
+                <a:solidFill>
+                  <a:srgbClr val="1A1A1A"/>
                 </a:solidFill>
                 <a:latin typeface="Arial"/>
               </a:rPr>
@@ -3153,27 +3148,22 @@
       </p:sp>
       <p:sp>
         <p:nvSpPr>
-          <p:cNvPr id="3" name="Rectangle 2"/>
-          <p:cNvSpPr/>
+          <p:cNvPr id="3" name="Kopf Tätigkeiten"/>
+          <p:cNvSpPr txBox="1"/>
           <p:nvPr/>
         </p:nvSpPr>
         <p:spPr>
           <a:xfrm>
-            <a:off x="1368000" y="216000"/>
-            <a:ext cx="1008000" cy="357906"/>
+            <a:off x="1368000" y="180000"/>
+            <a:ext cx="1008000" cy="314706"/>
           </a:xfrm>
           <a:prstGeom prst="rect">
             <a:avLst/>
           </a:prstGeom>
-          <a:solidFill>
-            <a:srgbClr val="3A3F44"/>
-          </a:solidFill>
-          <a:ln>
-            <a:noFill/>
-          </a:ln>
-        </p:spPr>
-        <p:txBody>
-          <a:bodyPr rtlCol="0" anchor="ctr" lIns="32400" rIns="32400" tIns="21600" bIns="21600" wrap="square">
+          <a:noFill/>
+        </p:spPr>
+        <p:txBody>
+          <a:bodyPr wrap="square" lIns="32400" rIns="32400" tIns="0" bIns="0" anchor="b">
             <a:noAutofit/>
           </a:bodyPr>
           <a:lstStyle/>
@@ -3185,45 +3175,45 @@
               <a:buNone/>
             </a:pPr>
             <a:r>
-              <a:rPr lang="de-DE" sz="700" b="1" i="0">
-                <a:solidFill>
-                  <a:srgbClr val="FFFFFF"/>
+              <a:rPr lang="de-DE" sz="700" b="0" i="1">
+                <a:solidFill>
+                  <a:srgbClr val="1A1A1A"/>
                 </a:solidFill>
                 <a:latin typeface="Arial"/>
               </a:rPr>
               <a:t>Tätigkeiten der</a:t>
             </a:r>
             <a:br>
-              <a:rPr lang="de-DE" sz="700" b="1" i="0">
-                <a:solidFill>
-                  <a:srgbClr val="FFFFFF"/>
+              <a:rPr lang="de-DE" sz="700" b="0" i="1">
+                <a:solidFill>
+                  <a:srgbClr val="1A1A1A"/>
                 </a:solidFill>
                 <a:latin typeface="Arial"/>
                 <a:cs typeface="Arial"/>
               </a:rPr>
             </a:br>
             <a:r>
-              <a:rPr lang="de-DE" sz="700" b="1" i="0">
-                <a:solidFill>
-                  <a:srgbClr val="FFFFFF"/>
+              <a:rPr lang="de-DE" sz="700" b="0" i="1">
+                <a:solidFill>
+                  <a:srgbClr val="1A1A1A"/>
                 </a:solidFill>
                 <a:latin typeface="Arial"/>
               </a:rPr>
               <a:t>Unternehmungs-</a:t>
             </a:r>
             <a:br>
-              <a:rPr lang="de-DE" sz="700" b="1" i="0">
-                <a:solidFill>
-                  <a:srgbClr val="FFFFFF"/>
+              <a:rPr lang="de-DE" sz="700" b="0" i="1">
+                <a:solidFill>
+                  <a:srgbClr val="1A1A1A"/>
                 </a:solidFill>
                 <a:latin typeface="Arial"/>
                 <a:cs typeface="Arial"/>
               </a:rPr>
             </a:br>
             <a:r>
-              <a:rPr lang="de-DE" sz="700" b="1" i="0">
-                <a:solidFill>
-                  <a:srgbClr val="FFFFFF"/>
+              <a:rPr lang="de-DE" sz="700" b="0" i="1">
+                <a:solidFill>
+                  <a:srgbClr val="1A1A1A"/>
                 </a:solidFill>
                 <a:latin typeface="Arial"/>
               </a:rPr>
@@ -3240,7 +3230,7 @@
         </p:nvSpPr>
         <p:spPr>
           <a:xfrm>
-            <a:off x="360000" y="573906"/>
+            <a:off x="360000" y="552306"/>
             <a:ext cx="1008000" cy="289004"/>
           </a:xfrm>
           <a:prstGeom prst="rect">
@@ -3257,7 +3247,29 @@
           </a:ln>
         </p:spPr>
         <p:txBody>
-          <a:bodyPr rtlCol="0" anchor="ctr" lIns="32400" rIns="32400" tIns="21600" bIns="21600" wrap="square">
+          <a:bodyPr rtlCol="0" anchor="ctr"/>
+          <a:lstStyle/>
+          <a:p/>
+        </p:txBody>
+      </p:sp>
+      <p:sp>
+        <p:nvSpPr>
+          <p:cNvPr id="5" name="Nummer Phase 1"/>
+          <p:cNvSpPr txBox="1"/>
+          <p:nvPr/>
+        </p:nvSpPr>
+        <p:spPr>
+          <a:xfrm>
+            <a:off x="392400" y="591906"/>
+            <a:ext cx="115200" cy="209804"/>
+          </a:xfrm>
+          <a:prstGeom prst="rect">
+            <a:avLst/>
+          </a:prstGeom>
+          <a:noFill/>
+        </p:spPr>
+        <p:txBody>
+          <a:bodyPr wrap="square" lIns="0" rIns="0" tIns="0" bIns="0" anchor="t">
             <a:noAutofit/>
           </a:bodyPr>
           <a:lstStyle/>
@@ -3275,7 +3287,47 @@
                 </a:solidFill>
                 <a:latin typeface="Arial"/>
               </a:rPr>
-              <a:t>1. Problemstellungs-</a:t>
+              <a:t>1.</a:t>
+            </a:r>
+          </a:p>
+        </p:txBody>
+      </p:sp>
+      <p:sp>
+        <p:nvSpPr>
+          <p:cNvPr id="6" name="Text Phase 1"/>
+          <p:cNvSpPr txBox="1"/>
+          <p:nvPr/>
+        </p:nvSpPr>
+        <p:spPr>
+          <a:xfrm>
+            <a:off x="500400" y="591906"/>
+            <a:ext cx="835200" cy="209804"/>
+          </a:xfrm>
+          <a:prstGeom prst="rect">
+            <a:avLst/>
+          </a:prstGeom>
+          <a:noFill/>
+        </p:spPr>
+        <p:txBody>
+          <a:bodyPr wrap="square" lIns="0" rIns="0" tIns="0" bIns="0" anchor="t">
+            <a:noAutofit/>
+          </a:bodyPr>
+          <a:lstStyle/>
+          <a:p>
+            <a:pPr algn="l">
+              <a:lnSpc>
+                <a:spcPts val="826"/>
+              </a:lnSpc>
+              <a:buNone/>
+            </a:pPr>
+            <a:r>
+              <a:rPr lang="de-DE" sz="700" b="0" i="0">
+                <a:solidFill>
+                  <a:srgbClr val="1A1A1A"/>
+                </a:solidFill>
+                <a:latin typeface="Arial"/>
+              </a:rPr>
+              <a:t>Problemstellungs-</a:t>
             </a:r>
             <a:br>
               <a:rPr lang="de-DE" sz="700" b="0" i="0">
@@ -3300,13 +3352,13 @@
       </p:sp>
       <p:sp>
         <p:nvSpPr>
-          <p:cNvPr id="5" name="Phase 2"/>
+          <p:cNvPr id="7" name="Phase 2"/>
           <p:cNvSpPr/>
           <p:nvPr/>
         </p:nvSpPr>
         <p:spPr>
           <a:xfrm>
-            <a:off x="360000" y="862910"/>
+            <a:off x="360000" y="841310"/>
             <a:ext cx="1008000" cy="252000"/>
           </a:xfrm>
           <a:prstGeom prst="rect">
@@ -3323,7 +3375,29 @@
           </a:ln>
         </p:spPr>
         <p:txBody>
-          <a:bodyPr rtlCol="0" anchor="ctr" lIns="32400" rIns="32400" tIns="21600" bIns="21600" wrap="square">
+          <a:bodyPr rtlCol="0" anchor="ctr"/>
+          <a:lstStyle/>
+          <a:p/>
+        </p:txBody>
+      </p:sp>
+      <p:sp>
+        <p:nvSpPr>
+          <p:cNvPr id="8" name="Nummer Phase 2"/>
+          <p:cNvSpPr txBox="1"/>
+          <p:nvPr/>
+        </p:nvSpPr>
+        <p:spPr>
+          <a:xfrm>
+            <a:off x="392400" y="914859"/>
+            <a:ext cx="115200" cy="104902"/>
+          </a:xfrm>
+          <a:prstGeom prst="rect">
+            <a:avLst/>
+          </a:prstGeom>
+          <a:noFill/>
+        </p:spPr>
+        <p:txBody>
+          <a:bodyPr wrap="square" lIns="0" rIns="0" tIns="0" bIns="0" anchor="t">
             <a:noAutofit/>
           </a:bodyPr>
           <a:lstStyle/>
@@ -3341,20 +3415,60 @@
                 </a:solidFill>
                 <a:latin typeface="Arial"/>
               </a:rPr>
-              <a:t>2. Suchphase</a:t>
-            </a:r>
-          </a:p>
-        </p:txBody>
-      </p:sp>
-      <p:sp>
-        <p:nvSpPr>
-          <p:cNvPr id="6" name="Phase 3"/>
+              <a:t>2.</a:t>
+            </a:r>
+          </a:p>
+        </p:txBody>
+      </p:sp>
+      <p:sp>
+        <p:nvSpPr>
+          <p:cNvPr id="9" name="Text Phase 2"/>
+          <p:cNvSpPr txBox="1"/>
+          <p:nvPr/>
+        </p:nvSpPr>
+        <p:spPr>
+          <a:xfrm>
+            <a:off x="500400" y="914859"/>
+            <a:ext cx="835200" cy="104902"/>
+          </a:xfrm>
+          <a:prstGeom prst="rect">
+            <a:avLst/>
+          </a:prstGeom>
+          <a:noFill/>
+        </p:spPr>
+        <p:txBody>
+          <a:bodyPr wrap="square" lIns="0" rIns="0" tIns="0" bIns="0" anchor="t">
+            <a:noAutofit/>
+          </a:bodyPr>
+          <a:lstStyle/>
+          <a:p>
+            <a:pPr algn="l">
+              <a:lnSpc>
+                <a:spcPts val="826"/>
+              </a:lnSpc>
+              <a:buNone/>
+            </a:pPr>
+            <a:r>
+              <a:rPr lang="de-DE" sz="700" b="0" i="0">
+                <a:solidFill>
+                  <a:srgbClr val="1A1A1A"/>
+                </a:solidFill>
+                <a:latin typeface="Arial"/>
+              </a:rPr>
+              <a:t>Suchphase</a:t>
+            </a:r>
+          </a:p>
+        </p:txBody>
+      </p:sp>
+      <p:sp>
+        <p:nvSpPr>
+          <p:cNvPr id="10" name="Phase 3"/>
           <p:cNvSpPr/>
           <p:nvPr/>
         </p:nvSpPr>
         <p:spPr>
           <a:xfrm>
-            <a:off x="360000" y="1114910"/>
+            <a:off x="360000" y="1093310"/>
             <a:ext cx="1008000" cy="289004"/>
           </a:xfrm>
           <a:prstGeom prst="rect">
@@ -3371,7 +3485,29 @@
           </a:ln>
         </p:spPr>
         <p:txBody>
-          <a:bodyPr rtlCol="0" anchor="ctr" lIns="32400" rIns="32400" tIns="21600" bIns="21600" wrap="square">
+          <a:bodyPr rtlCol="0" anchor="ctr"/>
+          <a:lstStyle/>
+          <a:p/>
+        </p:txBody>
+      </p:sp>
+      <p:sp>
+        <p:nvSpPr>
+          <p:cNvPr id="11" name="Nummer Phase 3"/>
+          <p:cNvSpPr txBox="1"/>
+          <p:nvPr/>
+        </p:nvSpPr>
+        <p:spPr>
+          <a:xfrm>
+            <a:off x="392400" y="1132910"/>
+            <a:ext cx="115200" cy="209804"/>
+          </a:xfrm>
+          <a:prstGeom prst="rect">
+            <a:avLst/>
+          </a:prstGeom>
+          <a:noFill/>
+        </p:spPr>
+        <p:txBody>
+          <a:bodyPr wrap="square" lIns="0" rIns="0" tIns="0" bIns="0" anchor="t">
             <a:noAutofit/>
           </a:bodyPr>
           <a:lstStyle/>
@@ -3389,7 +3525,47 @@
                 </a:solidFill>
                 <a:latin typeface="Arial"/>
               </a:rPr>
-              <a:t>3. Beurteilungsphase</a:t>
+              <a:t>3.</a:t>
+            </a:r>
+          </a:p>
+        </p:txBody>
+      </p:sp>
+      <p:sp>
+        <p:nvSpPr>
+          <p:cNvPr id="12" name="Text Phase 3"/>
+          <p:cNvSpPr txBox="1"/>
+          <p:nvPr/>
+        </p:nvSpPr>
+        <p:spPr>
+          <a:xfrm>
+            <a:off x="500400" y="1132910"/>
+            <a:ext cx="835200" cy="209804"/>
+          </a:xfrm>
+          <a:prstGeom prst="rect">
+            <a:avLst/>
+          </a:prstGeom>
+          <a:noFill/>
+        </p:spPr>
+        <p:txBody>
+          <a:bodyPr wrap="square" lIns="0" rIns="0" tIns="0" bIns="0" anchor="t">
+            <a:noAutofit/>
+          </a:bodyPr>
+          <a:lstStyle/>
+          <a:p>
+            <a:pPr algn="l">
+              <a:lnSpc>
+                <a:spcPts val="826"/>
+              </a:lnSpc>
+              <a:buNone/>
+            </a:pPr>
+            <a:r>
+              <a:rPr lang="de-DE" sz="700" b="0" i="0">
+                <a:solidFill>
+                  <a:srgbClr val="1A1A1A"/>
+                </a:solidFill>
+                <a:latin typeface="Arial"/>
+              </a:rPr>
+              <a:t>Beurteilungsphase</a:t>
             </a:r>
             <a:br>
               <a:rPr lang="de-DE" sz="700" b="0" i="0">
@@ -3414,13 +3590,13 @@
       </p:sp>
       <p:sp>
         <p:nvSpPr>
-          <p:cNvPr id="7" name="Phase 4"/>
+          <p:cNvPr id="13" name="Phase 4"/>
           <p:cNvSpPr/>
           <p:nvPr/>
         </p:nvSpPr>
         <p:spPr>
           <a:xfrm>
-            <a:off x="360000" y="1403914"/>
+            <a:off x="360000" y="1382314"/>
             <a:ext cx="1008000" cy="289004"/>
           </a:xfrm>
           <a:prstGeom prst="rect">
@@ -3437,7 +3613,29 @@
           </a:ln>
         </p:spPr>
         <p:txBody>
-          <a:bodyPr rtlCol="0" anchor="ctr" lIns="32400" rIns="32400" tIns="21600" bIns="21600" wrap="square">
+          <a:bodyPr rtlCol="0" anchor="ctr"/>
+          <a:lstStyle/>
+          <a:p/>
+        </p:txBody>
+      </p:sp>
+      <p:sp>
+        <p:nvSpPr>
+          <p:cNvPr id="14" name="Nummer Phase 4"/>
+          <p:cNvSpPr txBox="1"/>
+          <p:nvPr/>
+        </p:nvSpPr>
+        <p:spPr>
+          <a:xfrm>
+            <a:off x="392400" y="1421914"/>
+            <a:ext cx="115200" cy="209804"/>
+          </a:xfrm>
+          <a:prstGeom prst="rect">
+            <a:avLst/>
+          </a:prstGeom>
+          <a:noFill/>
+        </p:spPr>
+        <p:txBody>
+          <a:bodyPr wrap="square" lIns="0" rIns="0" tIns="0" bIns="0" anchor="t">
             <a:noAutofit/>
           </a:bodyPr>
           <a:lstStyle/>
@@ -3455,7 +3653,47 @@
                 </a:solidFill>
                 <a:latin typeface="Arial"/>
               </a:rPr>
-              <a:t>4. Entscheidungs-</a:t>
+              <a:t>4.</a:t>
+            </a:r>
+          </a:p>
+        </p:txBody>
+      </p:sp>
+      <p:sp>
+        <p:nvSpPr>
+          <p:cNvPr id="15" name="Text Phase 4"/>
+          <p:cNvSpPr txBox="1"/>
+          <p:nvPr/>
+        </p:nvSpPr>
+        <p:spPr>
+          <a:xfrm>
+            <a:off x="500400" y="1421914"/>
+            <a:ext cx="835200" cy="209804"/>
+          </a:xfrm>
+          <a:prstGeom prst="rect">
+            <a:avLst/>
+          </a:prstGeom>
+          <a:noFill/>
+        </p:spPr>
+        <p:txBody>
+          <a:bodyPr wrap="square" lIns="0" rIns="0" tIns="0" bIns="0" anchor="t">
+            <a:noAutofit/>
+          </a:bodyPr>
+          <a:lstStyle/>
+          <a:p>
+            <a:pPr algn="l">
+              <a:lnSpc>
+                <a:spcPts val="826"/>
+              </a:lnSpc>
+              <a:buNone/>
+            </a:pPr>
+            <a:r>
+              <a:rPr lang="de-DE" sz="700" b="0" i="0">
+                <a:solidFill>
+                  <a:srgbClr val="1A1A1A"/>
+                </a:solidFill>
+                <a:latin typeface="Arial"/>
+              </a:rPr>
+              <a:t>Entscheidungs-</a:t>
             </a:r>
             <a:br>
               <a:rPr lang="de-DE" sz="700" b="0" i="0">
@@ -3480,13 +3718,13 @@
       </p:sp>
       <p:sp>
         <p:nvSpPr>
-          <p:cNvPr id="8" name="Phase 5"/>
+          <p:cNvPr id="16" name="Phase 5"/>
           <p:cNvSpPr/>
           <p:nvPr/>
         </p:nvSpPr>
         <p:spPr>
           <a:xfrm>
-            <a:off x="360000" y="1692918"/>
+            <a:off x="360000" y="1671318"/>
             <a:ext cx="1008000" cy="616410"/>
           </a:xfrm>
           <a:prstGeom prst="rect">
@@ -3503,7 +3741,29 @@
           </a:ln>
         </p:spPr>
         <p:txBody>
-          <a:bodyPr rtlCol="0" anchor="ctr" lIns="32400" rIns="32400" tIns="21600" bIns="21600" wrap="square">
+          <a:bodyPr rtlCol="0" anchor="ctr"/>
+          <a:lstStyle/>
+          <a:p/>
+        </p:txBody>
+      </p:sp>
+      <p:sp>
+        <p:nvSpPr>
+          <p:cNvPr id="17" name="Nummer Phase 5"/>
+          <p:cNvSpPr txBox="1"/>
+          <p:nvPr/>
+        </p:nvSpPr>
+        <p:spPr>
+          <a:xfrm>
+            <a:off x="392400" y="1927072"/>
+            <a:ext cx="115200" cy="104902"/>
+          </a:xfrm>
+          <a:prstGeom prst="rect">
+            <a:avLst/>
+          </a:prstGeom>
+          <a:noFill/>
+        </p:spPr>
+        <p:txBody>
+          <a:bodyPr wrap="square" lIns="0" rIns="0" tIns="0" bIns="0" anchor="t">
             <a:noAutofit/>
           </a:bodyPr>
           <a:lstStyle/>
@@ -3521,20 +3781,60 @@
                 </a:solidFill>
                 <a:latin typeface="Arial"/>
               </a:rPr>
-              <a:t>5. Realisationsphase</a:t>
-            </a:r>
-          </a:p>
-        </p:txBody>
-      </p:sp>
-      <p:sp>
-        <p:nvSpPr>
-          <p:cNvPr id="9" name="Phase 6"/>
+              <a:t>5.</a:t>
+            </a:r>
+          </a:p>
+        </p:txBody>
+      </p:sp>
+      <p:sp>
+        <p:nvSpPr>
+          <p:cNvPr id="18" name="Text Phase 5"/>
+          <p:cNvSpPr txBox="1"/>
+          <p:nvPr/>
+        </p:nvSpPr>
+        <p:spPr>
+          <a:xfrm>
+            <a:off x="500400" y="1927072"/>
+            <a:ext cx="835200" cy="104902"/>
+          </a:xfrm>
+          <a:prstGeom prst="rect">
+            <a:avLst/>
+          </a:prstGeom>
+          <a:noFill/>
+        </p:spPr>
+        <p:txBody>
+          <a:bodyPr wrap="square" lIns="0" rIns="0" tIns="0" bIns="0" anchor="t">
+            <a:noAutofit/>
+          </a:bodyPr>
+          <a:lstStyle/>
+          <a:p>
+            <a:pPr algn="l">
+              <a:lnSpc>
+                <a:spcPts val="826"/>
+              </a:lnSpc>
+              <a:buNone/>
+            </a:pPr>
+            <a:r>
+              <a:rPr lang="de-DE" sz="700" b="0" i="0">
+                <a:solidFill>
+                  <a:srgbClr val="1A1A1A"/>
+                </a:solidFill>
+                <a:latin typeface="Arial"/>
+              </a:rPr>
+              <a:t>Realisationsphase</a:t>
+            </a:r>
+          </a:p>
+        </p:txBody>
+      </p:sp>
+      <p:sp>
+        <p:nvSpPr>
+          <p:cNvPr id="19" name="Phase 6"/>
           <p:cNvSpPr/>
           <p:nvPr/>
         </p:nvSpPr>
         <p:spPr>
           <a:xfrm>
-            <a:off x="360000" y="2309328"/>
+            <a:off x="360000" y="2287728"/>
             <a:ext cx="1008000" cy="498808"/>
           </a:xfrm>
           <a:prstGeom prst="rect">
@@ -3551,7 +3851,29 @@
           </a:ln>
         </p:spPr>
         <p:txBody>
-          <a:bodyPr rtlCol="0" anchor="ctr" lIns="32400" rIns="32400" tIns="21600" bIns="21600" wrap="square">
+          <a:bodyPr rtlCol="0" anchor="ctr"/>
+          <a:lstStyle/>
+          <a:p/>
+        </p:txBody>
+      </p:sp>
+      <p:sp>
+        <p:nvSpPr>
+          <p:cNvPr id="20" name="Nummer Phase 6"/>
+          <p:cNvSpPr txBox="1"/>
+          <p:nvPr/>
+        </p:nvSpPr>
+        <p:spPr>
+          <a:xfrm>
+            <a:off x="392400" y="2484681"/>
+            <a:ext cx="115200" cy="104902"/>
+          </a:xfrm>
+          <a:prstGeom prst="rect">
+            <a:avLst/>
+          </a:prstGeom>
+          <a:noFill/>
+        </p:spPr>
+        <p:txBody>
+          <a:bodyPr wrap="square" lIns="0" rIns="0" tIns="0" bIns="0" anchor="t">
             <a:noAutofit/>
           </a:bodyPr>
           <a:lstStyle/>
@@ -3569,20 +3891,60 @@
                 </a:solidFill>
                 <a:latin typeface="Arial"/>
               </a:rPr>
-              <a:t>6. Kontrollphase</a:t>
-            </a:r>
-          </a:p>
-        </p:txBody>
-      </p:sp>
-      <p:sp>
-        <p:nvSpPr>
-          <p:cNvPr id="10" name="Entscheidungsvorbereitung"/>
+              <a:t>6.</a:t>
+            </a:r>
+          </a:p>
+        </p:txBody>
+      </p:sp>
+      <p:sp>
+        <p:nvSpPr>
+          <p:cNvPr id="21" name="Text Phase 6"/>
+          <p:cNvSpPr txBox="1"/>
+          <p:nvPr/>
+        </p:nvSpPr>
+        <p:spPr>
+          <a:xfrm>
+            <a:off x="500400" y="2484681"/>
+            <a:ext cx="835200" cy="104902"/>
+          </a:xfrm>
+          <a:prstGeom prst="rect">
+            <a:avLst/>
+          </a:prstGeom>
+          <a:noFill/>
+        </p:spPr>
+        <p:txBody>
+          <a:bodyPr wrap="square" lIns="0" rIns="0" tIns="0" bIns="0" anchor="t">
+            <a:noAutofit/>
+          </a:bodyPr>
+          <a:lstStyle/>
+          <a:p>
+            <a:pPr algn="l">
+              <a:lnSpc>
+                <a:spcPts val="826"/>
+              </a:lnSpc>
+              <a:buNone/>
+            </a:pPr>
+            <a:r>
+              <a:rPr lang="de-DE" sz="700" b="0" i="0">
+                <a:solidFill>
+                  <a:srgbClr val="1A1A1A"/>
+                </a:solidFill>
+                <a:latin typeface="Arial"/>
+              </a:rPr>
+              <a:t>Kontrollphase</a:t>
+            </a:r>
+          </a:p>
+        </p:txBody>
+      </p:sp>
+      <p:sp>
+        <p:nvSpPr>
+          <p:cNvPr id="22" name="Entscheidungsvorbereitung"/>
           <p:cNvSpPr/>
           <p:nvPr/>
         </p:nvSpPr>
         <p:spPr>
           <a:xfrm>
-            <a:off x="1368000" y="573906"/>
+            <a:off x="1368000" y="552306"/>
             <a:ext cx="1008000" cy="830008"/>
           </a:xfrm>
           <a:prstGeom prst="rect">
@@ -3642,13 +4004,13 @@
       </p:sp>
       <p:sp>
         <p:nvSpPr>
-          <p:cNvPr id="11" name="Tätigkeit 4"/>
+          <p:cNvPr id="23" name="Tätigkeit 4"/>
           <p:cNvSpPr/>
           <p:nvPr/>
         </p:nvSpPr>
         <p:spPr>
           <a:xfrm>
-            <a:off x="1368000" y="1403914"/>
+            <a:off x="1368000" y="1382314"/>
             <a:ext cx="1008000" cy="289004"/>
           </a:xfrm>
           <a:prstGeom prst="rect">
@@ -3690,13 +4052,13 @@
       </p:sp>
       <p:sp>
         <p:nvSpPr>
-          <p:cNvPr id="12" name="Tätigkeit 5"/>
+          <p:cNvPr id="24" name="Tätigkeit 5"/>
           <p:cNvSpPr/>
           <p:nvPr/>
         </p:nvSpPr>
         <p:spPr>
           <a:xfrm>
-            <a:off x="1368000" y="1692918"/>
+            <a:off x="1368000" y="1671318"/>
             <a:ext cx="1008000" cy="616410"/>
           </a:xfrm>
           <a:prstGeom prst="rect">
@@ -3814,13 +4176,13 @@
       </p:sp>
       <p:sp>
         <p:nvSpPr>
-          <p:cNvPr id="13" name="Tätigkeit 6"/>
+          <p:cNvPr id="25" name="Tätigkeit 6"/>
           <p:cNvSpPr/>
           <p:nvPr/>
         </p:nvSpPr>
         <p:spPr>
           <a:xfrm>
-            <a:off x="1368000" y="2309328"/>
+            <a:off x="1368000" y="2287728"/>
             <a:ext cx="1008000" cy="498808"/>
           </a:xfrm>
           <a:prstGeom prst="rect">
@@ -3916,13 +4278,13 @@
       </p:sp>
       <p:sp>
         <p:nvSpPr>
-          <p:cNvPr id="14" name="Freeform 13"/>
+          <p:cNvPr id="26" name="Freeform 25"/>
           <p:cNvSpPr/>
           <p:nvPr/>
         </p:nvSpPr>
         <p:spPr>
           <a:xfrm>
-            <a:off x="2448000" y="602706"/>
+            <a:off x="2448000" y="581106"/>
             <a:ext cx="50400" cy="772408"/>
           </a:xfrm>
           <a:custGeom>
@@ -3966,13 +4328,13 @@
       </p:sp>
       <p:sp>
         <p:nvSpPr>
-          <p:cNvPr id="15" name="Freeform 14"/>
+          <p:cNvPr id="27" name="Freeform 26"/>
           <p:cNvSpPr/>
           <p:nvPr/>
         </p:nvSpPr>
         <p:spPr>
           <a:xfrm>
-            <a:off x="2498400" y="988910"/>
+            <a:off x="2498400" y="967310"/>
             <a:ext cx="50400" cy="0"/>
           </a:xfrm>
           <a:custGeom>
@@ -4010,13 +4372,13 @@
       </p:sp>
       <p:sp>
         <p:nvSpPr>
-          <p:cNvPr id="16" name="Klammer Planauf­stellung"/>
+          <p:cNvPr id="28" name="Klammer Planauf­stellung"/>
           <p:cNvSpPr txBox="1"/>
           <p:nvPr/>
         </p:nvSpPr>
         <p:spPr>
           <a:xfrm>
-            <a:off x="2570400" y="771906"/>
+            <a:off x="2570400" y="750306"/>
             <a:ext cx="590400" cy="434008"/>
           </a:xfrm>
           <a:prstGeom prst="rect">
@@ -4103,13 +4465,13 @@
       </p:sp>
       <p:sp>
         <p:nvSpPr>
-          <p:cNvPr id="17" name="Freeform 16"/>
+          <p:cNvPr id="29" name="Freeform 28"/>
           <p:cNvSpPr/>
           <p:nvPr/>
         </p:nvSpPr>
         <p:spPr>
           <a:xfrm>
-            <a:off x="2448000" y="1432714"/>
+            <a:off x="2448000" y="1411114"/>
             <a:ext cx="50400" cy="231404"/>
           </a:xfrm>
           <a:custGeom>
@@ -4153,13 +4515,13 @@
       </p:sp>
       <p:sp>
         <p:nvSpPr>
-          <p:cNvPr id="18" name="Freeform 17"/>
+          <p:cNvPr id="30" name="Freeform 29"/>
           <p:cNvSpPr/>
           <p:nvPr/>
         </p:nvSpPr>
         <p:spPr>
           <a:xfrm>
-            <a:off x="2498400" y="1548416"/>
+            <a:off x="2498400" y="1526816"/>
             <a:ext cx="50400" cy="0"/>
           </a:xfrm>
           <a:custGeom>
@@ -4197,13 +4559,13 @@
       </p:sp>
       <p:sp>
         <p:nvSpPr>
-          <p:cNvPr id="19" name="Klammer Planverab­schiedung"/>
+          <p:cNvPr id="31" name="Klammer Planverab­schiedung"/>
           <p:cNvSpPr txBox="1"/>
           <p:nvPr/>
         </p:nvSpPr>
         <p:spPr>
           <a:xfrm>
-            <a:off x="2570400" y="1436314"/>
+            <a:off x="2570400" y="1414714"/>
             <a:ext cx="590400" cy="224204"/>
           </a:xfrm>
           <a:prstGeom prst="rect">
@@ -4255,13 +4617,13 @@
       </p:sp>
       <p:sp>
         <p:nvSpPr>
-          <p:cNvPr id="20" name="Freeform 19"/>
+          <p:cNvPr id="32" name="Freeform 31"/>
           <p:cNvSpPr/>
           <p:nvPr/>
         </p:nvSpPr>
         <p:spPr>
           <a:xfrm>
-            <a:off x="2448000" y="1721718"/>
+            <a:off x="2448000" y="1700118"/>
             <a:ext cx="50400" cy="558810"/>
           </a:xfrm>
           <a:custGeom>
@@ -4305,13 +4667,13 @@
       </p:sp>
       <p:sp>
         <p:nvSpPr>
-          <p:cNvPr id="21" name="Freeform 20"/>
+          <p:cNvPr id="33" name="Freeform 32"/>
           <p:cNvSpPr/>
           <p:nvPr/>
         </p:nvSpPr>
         <p:spPr>
           <a:xfrm>
-            <a:off x="2498400" y="2001123"/>
+            <a:off x="2498400" y="1979523"/>
             <a:ext cx="50400" cy="0"/>
           </a:xfrm>
           <a:custGeom>
@@ -4349,13 +4711,13 @@
       </p:sp>
       <p:sp>
         <p:nvSpPr>
-          <p:cNvPr id="22" name="Klammer Steuerung"/>
+          <p:cNvPr id="34" name="Klammer Steuerung"/>
           <p:cNvSpPr txBox="1"/>
           <p:nvPr/>
         </p:nvSpPr>
         <p:spPr>
           <a:xfrm>
-            <a:off x="2570400" y="1941472"/>
+            <a:off x="2570400" y="1919872"/>
             <a:ext cx="590400" cy="119302"/>
           </a:xfrm>
           <a:prstGeom prst="rect">
@@ -4389,13 +4751,13 @@
       </p:sp>
       <p:sp>
         <p:nvSpPr>
-          <p:cNvPr id="23" name="Freeform 22"/>
+          <p:cNvPr id="35" name="Freeform 34"/>
           <p:cNvSpPr/>
           <p:nvPr/>
         </p:nvSpPr>
         <p:spPr>
           <a:xfrm>
-            <a:off x="2448000" y="2338128"/>
+            <a:off x="2448000" y="2316528"/>
             <a:ext cx="50400" cy="441208"/>
           </a:xfrm>
           <a:custGeom>
@@ -4439,13 +4801,13 @@
       </p:sp>
       <p:sp>
         <p:nvSpPr>
-          <p:cNvPr id="24" name="Freeform 23"/>
+          <p:cNvPr id="36" name="Freeform 35"/>
           <p:cNvSpPr/>
           <p:nvPr/>
         </p:nvSpPr>
         <p:spPr>
           <a:xfrm>
-            <a:off x="2498400" y="2558732"/>
+            <a:off x="2498400" y="2537132"/>
             <a:ext cx="50400" cy="0"/>
           </a:xfrm>
           <a:custGeom>
@@ -4483,13 +4845,13 @@
       </p:sp>
       <p:sp>
         <p:nvSpPr>
-          <p:cNvPr id="25" name="Klammer Kontrolle"/>
+          <p:cNvPr id="37" name="Klammer Kontrolle"/>
           <p:cNvSpPr txBox="1"/>
           <p:nvPr/>
         </p:nvSpPr>
         <p:spPr>
           <a:xfrm>
-            <a:off x="2570400" y="2499081"/>
+            <a:off x="2570400" y="2477481"/>
             <a:ext cx="590400" cy="119302"/>
           </a:xfrm>
           <a:prstGeom prst="rect">
@@ -4523,13 +4885,13 @@
       </p:sp>
       <p:sp>
         <p:nvSpPr>
-          <p:cNvPr id="26" name="Freeform 25"/>
+          <p:cNvPr id="38" name="Freeform 37"/>
           <p:cNvSpPr/>
           <p:nvPr/>
         </p:nvSpPr>
         <p:spPr>
           <a:xfrm>
-            <a:off x="3204000" y="602706"/>
+            <a:off x="3204000" y="581106"/>
             <a:ext cx="50400" cy="1061412"/>
           </a:xfrm>
           <a:custGeom>
@@ -4573,13 +4935,13 @@
       </p:sp>
       <p:sp>
         <p:nvSpPr>
-          <p:cNvPr id="27" name="Freeform 26"/>
+          <p:cNvPr id="39" name="Freeform 38"/>
           <p:cNvSpPr/>
           <p:nvPr/>
         </p:nvSpPr>
         <p:spPr>
           <a:xfrm>
-            <a:off x="3254400" y="1133412"/>
+            <a:off x="3254400" y="1111812"/>
             <a:ext cx="50400" cy="0"/>
           </a:xfrm>
           <a:custGeom>
@@ -4617,13 +4979,13 @@
       </p:sp>
       <p:sp>
         <p:nvSpPr>
-          <p:cNvPr id="28" name="Klammer Planung"/>
+          <p:cNvPr id="40" name="Klammer Planung"/>
           <p:cNvSpPr txBox="1"/>
           <p:nvPr/>
         </p:nvSpPr>
         <p:spPr>
           <a:xfrm>
-            <a:off x="3326400" y="1021310"/>
+            <a:off x="3326400" y="999710"/>
             <a:ext cx="590400" cy="224204"/>
           </a:xfrm>
           <a:prstGeom prst="rect">
@@ -4674,18 +5036,18 @@
       </p:sp>
       <p:sp>
         <p:nvSpPr>
-          <p:cNvPr id="29" name="Durchführung"/>
+          <p:cNvPr id="41" name="Durchführung"/>
           <p:cNvSpPr/>
           <p:nvPr/>
         </p:nvSpPr>
         <p:spPr>
           <a:xfrm>
-            <a:off x="3225600" y="1908918"/>
-            <a:ext cx="691200" cy="201600"/>
+            <a:off x="3247200" y="1752221"/>
+            <a:ext cx="684000" cy="165600"/>
           </a:xfrm>
           <a:prstGeom prst="roundRect">
             <a:avLst>
-              <a:gd name="adj" fmla="val 14285"/>
+              <a:gd name="adj" fmla="val 17391"/>
             </a:avLst>
           </a:prstGeom>
           <a:solidFill>
@@ -4724,14 +5086,14 @@
       </p:sp>
       <p:sp>
         <p:nvSpPr>
-          <p:cNvPr id="30" name="Freeform 29"/>
+          <p:cNvPr id="42" name="Freeform 41"/>
           <p:cNvSpPr/>
           <p:nvPr/>
         </p:nvSpPr>
         <p:spPr>
           <a:xfrm>
-            <a:off x="2376000" y="1692918"/>
-            <a:ext cx="1195200" cy="216000"/>
+            <a:off x="2376000" y="1671318"/>
+            <a:ext cx="1213200" cy="80903"/>
           </a:xfrm>
           <a:custGeom>
             <a:avLst/>
@@ -4740,15 +5102,15 @@
             <a:cxnLst/>
             <a:rect l="l" t="t" r="r" b="b"/>
             <a:pathLst>
-              <a:path w="1195200" h="216000">
+              <a:path w="1213200" h="80903">
                 <a:moveTo>
                   <a:pt x="0" y="0"/>
                 </a:moveTo>
                 <a:lnTo>
-                  <a:pt x="1195200" y="0"/>
+                  <a:pt x="1213200" y="0"/>
                 </a:lnTo>
                 <a:lnTo>
-                  <a:pt x="1195200" y="216000"/>
+                  <a:pt x="1213200" y="80903"/>
                 </a:lnTo>
               </a:path>
             </a:pathLst>
@@ -4773,14 +5135,14 @@
       </p:sp>
       <p:sp>
         <p:nvSpPr>
-          <p:cNvPr id="31" name="Vorgabeinformation"/>
+          <p:cNvPr id="43" name="Vorgabeinformation"/>
           <p:cNvSpPr txBox="1"/>
           <p:nvPr/>
         </p:nvSpPr>
         <p:spPr>
           <a:xfrm>
-            <a:off x="2570400" y="1718118"/>
-            <a:ext cx="946800" cy="223200"/>
+            <a:off x="2570400" y="1696518"/>
+            <a:ext cx="658800" cy="223200"/>
           </a:xfrm>
           <a:prstGeom prst="rect">
             <a:avLst/>
@@ -4806,38 +5168,39 @@
                 </a:solidFill>
                 <a:latin typeface="Arial"/>
               </a:rPr>
-              <a:t>Vorgabeinformation</a:t>
-            </a:r>
-          </a:p>
-          <a:p>
-            <a:pPr algn="l">
-              <a:lnSpc>
-                <a:spcPts val="767"/>
-              </a:lnSpc>
-              <a:buNone/>
-            </a:pPr>
-            <a:r>
+              <a:t>Vorgabe-</a:t>
+            </a:r>
+            <a:br>
               <a:rPr lang="de-DE" sz="650" b="0" i="1">
                 <a:solidFill>
                   <a:srgbClr val="1A1A1A"/>
                 </a:solidFill>
                 <a:latin typeface="Arial"/>
-              </a:rPr>
-              <a:t>(Soll)</a:t>
-            </a:r>
-          </a:p>
-        </p:txBody>
-      </p:sp>
-      <p:sp>
-        <p:nvSpPr>
-          <p:cNvPr id="32" name="Freeform 31"/>
+                <a:cs typeface="Arial"/>
+              </a:rPr>
+            </a:br>
+            <a:r>
+              <a:rPr lang="de-DE" sz="650" b="0" i="1">
+                <a:solidFill>
+                  <a:srgbClr val="1A1A1A"/>
+                </a:solidFill>
+                <a:latin typeface="Arial"/>
+              </a:rPr>
+              <a:t>information (Soll)</a:t>
+            </a:r>
+          </a:p>
+        </p:txBody>
+      </p:sp>
+      <p:sp>
+        <p:nvSpPr>
+          <p:cNvPr id="44" name="Freeform 43"/>
           <p:cNvSpPr/>
           <p:nvPr/>
         </p:nvSpPr>
         <p:spPr>
           <a:xfrm>
             <a:off x="108000" y="72000"/>
-            <a:ext cx="3463200" cy="2851336"/>
+            <a:ext cx="3481200" cy="2829736"/>
           </a:xfrm>
           <a:custGeom>
             <a:avLst/>
@@ -4846,21 +5209,21 @@
             <a:cxnLst/>
             <a:rect l="l" t="t" r="r" b="b"/>
             <a:pathLst>
-              <a:path w="3463200" h="2851336">
+              <a:path w="3481200" h="2829736">
                 <a:moveTo>
-                  <a:pt x="3463200" y="2038518"/>
+                  <a:pt x="3481200" y="1845821"/>
                 </a:moveTo>
                 <a:lnTo>
-                  <a:pt x="3463200" y="2851336"/>
+                  <a:pt x="3481200" y="2829736"/>
                 </a:lnTo>
                 <a:lnTo>
-                  <a:pt x="0" y="2851336"/>
+                  <a:pt x="0" y="2829736"/>
                 </a:lnTo>
                 <a:lnTo>
                   <a:pt x="0" y="0"/>
                 </a:lnTo>
                 <a:lnTo>
-                  <a:pt x="86400" y="0"/>
+                  <a:pt x="126000" y="0"/>
                 </a:lnTo>
               </a:path>
             </a:pathLst>
@@ -4885,13 +5248,13 @@
       </p:sp>
       <p:sp>
         <p:nvSpPr>
-          <p:cNvPr id="33" name="Rückinformation"/>
+          <p:cNvPr id="45" name="Rückinformation"/>
           <p:cNvSpPr txBox="1"/>
           <p:nvPr/>
         </p:nvSpPr>
         <p:spPr>
           <a:xfrm>
-            <a:off x="2808000" y="2944936"/>
+            <a:off x="2808000" y="2923336"/>
             <a:ext cx="1108800" cy="129600"/>
           </a:xfrm>
           <a:prstGeom prst="rect">
@@ -4925,13 +5288,13 @@
       </p:sp>
       <p:sp>
         <p:nvSpPr>
-          <p:cNvPr id="34" name="Zielvorgabe"/>
+          <p:cNvPr id="46" name="Zielvorgabe"/>
           <p:cNvSpPr txBox="1"/>
           <p:nvPr/>
         </p:nvSpPr>
         <p:spPr>
           <a:xfrm>
-            <a:off x="201600" y="7200"/>
+            <a:off x="244800" y="7200"/>
             <a:ext cx="1080000" cy="129600"/>
           </a:xfrm>
           <a:prstGeom prst="rect">
@@ -4965,14 +5328,14 @@
       </p:sp>
       <p:sp>
         <p:nvSpPr>
-          <p:cNvPr id="35" name="Freeform 34"/>
+          <p:cNvPr id="47" name="Freeform 46"/>
           <p:cNvSpPr/>
           <p:nvPr/>
         </p:nvSpPr>
         <p:spPr>
           <a:xfrm>
             <a:off x="252000" y="140400"/>
-            <a:ext cx="0" cy="1860723"/>
+            <a:ext cx="0" cy="1839123"/>
           </a:xfrm>
           <a:custGeom>
             <a:avLst/>
@@ -4981,12 +5344,12 @@
             <a:cxnLst/>
             <a:rect l="l" t="t" r="r" b="b"/>
             <a:pathLst>
-              <a:path w="0" h="1860723">
+              <a:path w="0" h="1839123">
                 <a:moveTo>
                   <a:pt x="0" y="0"/>
                 </a:moveTo>
                 <a:lnTo>
-                  <a:pt x="0" y="1860723"/>
+                  <a:pt x="0" y="1839123"/>
                 </a:lnTo>
               </a:path>
             </a:pathLst>
@@ -5010,13 +5373,13 @@
       </p:sp>
       <p:sp>
         <p:nvSpPr>
-          <p:cNvPr id="36" name="Freeform 35"/>
+          <p:cNvPr id="48" name="Freeform 47"/>
           <p:cNvSpPr/>
           <p:nvPr/>
         </p:nvSpPr>
         <p:spPr>
           <a:xfrm>
-            <a:off x="252000" y="718408"/>
+            <a:off x="252000" y="696808"/>
             <a:ext cx="108000" cy="0"/>
           </a:xfrm>
           <a:custGeom>
@@ -5056,13 +5419,13 @@
       </p:sp>
       <p:sp>
         <p:nvSpPr>
-          <p:cNvPr id="37" name="Freeform 36"/>
+          <p:cNvPr id="49" name="Freeform 48"/>
           <p:cNvSpPr/>
           <p:nvPr/>
         </p:nvSpPr>
         <p:spPr>
           <a:xfrm>
-            <a:off x="252000" y="988910"/>
+            <a:off x="252000" y="967310"/>
             <a:ext cx="108000" cy="0"/>
           </a:xfrm>
           <a:custGeom>
@@ -5102,13 +5465,13 @@
       </p:sp>
       <p:sp>
         <p:nvSpPr>
-          <p:cNvPr id="38" name="Freeform 37"/>
+          <p:cNvPr id="50" name="Freeform 49"/>
           <p:cNvSpPr/>
           <p:nvPr/>
         </p:nvSpPr>
         <p:spPr>
           <a:xfrm>
-            <a:off x="252000" y="1259412"/>
+            <a:off x="252000" y="1237812"/>
             <a:ext cx="108000" cy="0"/>
           </a:xfrm>
           <a:custGeom>
@@ -5148,13 +5511,13 @@
       </p:sp>
       <p:sp>
         <p:nvSpPr>
-          <p:cNvPr id="39" name="Freeform 38"/>
+          <p:cNvPr id="51" name="Freeform 50"/>
           <p:cNvSpPr/>
           <p:nvPr/>
         </p:nvSpPr>
         <p:spPr>
           <a:xfrm>
-            <a:off x="252000" y="1548416"/>
+            <a:off x="252000" y="1526816"/>
             <a:ext cx="108000" cy="0"/>
           </a:xfrm>
           <a:custGeom>
@@ -5194,13 +5557,13 @@
       </p:sp>
       <p:sp>
         <p:nvSpPr>
-          <p:cNvPr id="40" name="Freeform 39"/>
+          <p:cNvPr id="52" name="Freeform 51"/>
           <p:cNvSpPr/>
           <p:nvPr/>
         </p:nvSpPr>
         <p:spPr>
           <a:xfrm>
-            <a:off x="252000" y="2001123"/>
+            <a:off x="252000" y="1979523"/>
             <a:ext cx="108000" cy="0"/>
           </a:xfrm>
           <a:custGeom>

--- a/abbildungen/kap2/Phasen_des_Planungs-_und_Steuerungsprozesses.pptx
+++ b/abbildungen/kap2/Phasen_des_Planungs-_und_Steuerungsprozesses.pptx
@@ -7,7 +7,7 @@
   <p:sldIdLst>
     <p:sldId id="256" r:id="rId7"/>
   </p:sldIdLst>
-  <p:sldSz cx="3960000" cy="3081600" type="screen4x3"/>
+  <p:sldSz cx="3960000" cy="2934000" type="screen4x3"/>
   <p:notesSz cx="6858000" cy="9144000"/>
   <p:defaultTextStyle>
     <a:defPPr>
@@ -3096,8 +3096,8 @@
         </p:nvSpPr>
         <p:spPr>
           <a:xfrm>
-            <a:off x="360000" y="180000"/>
-            <a:ext cx="1008000" cy="314706"/>
+            <a:off x="360000" y="14400"/>
+            <a:ext cx="1008000" cy="209804"/>
           </a:xfrm>
           <a:prstGeom prst="rect">
             <a:avLst/>
@@ -3125,15 +3125,14 @@
               </a:rPr>
               <a:t>Phasen des</a:t>
             </a:r>
-            <a:br>
-              <a:rPr lang="de-DE" sz="700" b="0" i="1">
-                <a:solidFill>
-                  <a:srgbClr val="1A1A1A"/>
-                </a:solidFill>
-                <a:latin typeface="Arial"/>
-                <a:cs typeface="Arial"/>
-              </a:rPr>
-            </a:br>
+          </a:p>
+          <a:p>
+            <a:pPr algn="ctr">
+              <a:lnSpc>
+                <a:spcPts val="826"/>
+              </a:lnSpc>
+              <a:buNone/>
+            </a:pPr>
             <a:r>
               <a:rPr lang="de-DE" sz="700" b="0" i="1">
                 <a:solidFill>
@@ -3154,8 +3153,8 @@
         </p:nvSpPr>
         <p:spPr>
           <a:xfrm>
-            <a:off x="1368000" y="180000"/>
-            <a:ext cx="1008000" cy="314706"/>
+            <a:off x="1332000" y="14400"/>
+            <a:ext cx="1080000" cy="209804"/>
           </a:xfrm>
           <a:prstGeom prst="rect">
             <a:avLst/>
@@ -3183,15 +3182,14 @@
               </a:rPr>
               <a:t>Tätigkeiten der</a:t>
             </a:r>
-            <a:br>
-              <a:rPr lang="de-DE" sz="700" b="0" i="1">
-                <a:solidFill>
-                  <a:srgbClr val="1A1A1A"/>
-                </a:solidFill>
-                <a:latin typeface="Arial"/>
-                <a:cs typeface="Arial"/>
-              </a:rPr>
-            </a:br>
+          </a:p>
+          <a:p>
+            <a:pPr algn="ctr">
+              <a:lnSpc>
+                <a:spcPts val="826"/>
+              </a:lnSpc>
+              <a:buNone/>
+            </a:pPr>
             <a:r>
               <a:rPr lang="de-DE" sz="700" b="0" i="1">
                 <a:solidFill>
@@ -3199,25 +3197,7 @@
                 </a:solidFill>
                 <a:latin typeface="Arial"/>
               </a:rPr>
-              <a:t>Unternehmungs-</a:t>
-            </a:r>
-            <a:br>
-              <a:rPr lang="de-DE" sz="700" b="0" i="1">
-                <a:solidFill>
-                  <a:srgbClr val="1A1A1A"/>
-                </a:solidFill>
-                <a:latin typeface="Arial"/>
-                <a:cs typeface="Arial"/>
-              </a:rPr>
-            </a:br>
-            <a:r>
-              <a:rPr lang="de-DE" sz="700" b="0" i="1">
-                <a:solidFill>
-                  <a:srgbClr val="1A1A1A"/>
-                </a:solidFill>
-                <a:latin typeface="Arial"/>
-              </a:rPr>
-              <a:t>führung</a:t>
+              <a:t>Unternehmungsführung</a:t>
             </a:r>
           </a:p>
         </p:txBody>
@@ -3230,7 +3210,7 @@
         </p:nvSpPr>
         <p:spPr>
           <a:xfrm>
-            <a:off x="360000" y="552306"/>
+            <a:off x="360000" y="404204"/>
             <a:ext cx="1008000" cy="289004"/>
           </a:xfrm>
           <a:prstGeom prst="rect">
@@ -3260,7 +3240,7 @@
         </p:nvSpPr>
         <p:spPr>
           <a:xfrm>
-            <a:off x="392400" y="591906"/>
+            <a:off x="392400" y="443804"/>
             <a:ext cx="115200" cy="209804"/>
           </a:xfrm>
           <a:prstGeom prst="rect">
@@ -3300,7 +3280,7 @@
         </p:nvSpPr>
         <p:spPr>
           <a:xfrm>
-            <a:off x="500400" y="591906"/>
+            <a:off x="500400" y="443804"/>
             <a:ext cx="835200" cy="209804"/>
           </a:xfrm>
           <a:prstGeom prst="rect">
@@ -3358,7 +3338,7 @@
         </p:nvSpPr>
         <p:spPr>
           <a:xfrm>
-            <a:off x="360000" y="841310"/>
+            <a:off x="360000" y="693208"/>
             <a:ext cx="1008000" cy="252000"/>
           </a:xfrm>
           <a:prstGeom prst="rect">
@@ -3388,7 +3368,7 @@
         </p:nvSpPr>
         <p:spPr>
           <a:xfrm>
-            <a:off x="392400" y="914859"/>
+            <a:off x="392400" y="766757"/>
             <a:ext cx="115200" cy="104902"/>
           </a:xfrm>
           <a:prstGeom prst="rect">
@@ -3428,7 +3408,7 @@
         </p:nvSpPr>
         <p:spPr>
           <a:xfrm>
-            <a:off x="500400" y="914859"/>
+            <a:off x="500400" y="766757"/>
             <a:ext cx="835200" cy="104902"/>
           </a:xfrm>
           <a:prstGeom prst="rect">
@@ -3468,7 +3448,7 @@
         </p:nvSpPr>
         <p:spPr>
           <a:xfrm>
-            <a:off x="360000" y="1093310"/>
+            <a:off x="360000" y="945208"/>
             <a:ext cx="1008000" cy="289004"/>
           </a:xfrm>
           <a:prstGeom prst="rect">
@@ -3498,7 +3478,7 @@
         </p:nvSpPr>
         <p:spPr>
           <a:xfrm>
-            <a:off x="392400" y="1132910"/>
+            <a:off x="392400" y="984808"/>
             <a:ext cx="115200" cy="209804"/>
           </a:xfrm>
           <a:prstGeom prst="rect">
@@ -3538,7 +3518,7 @@
         </p:nvSpPr>
         <p:spPr>
           <a:xfrm>
-            <a:off x="500400" y="1132910"/>
+            <a:off x="500400" y="984808"/>
             <a:ext cx="835200" cy="209804"/>
           </a:xfrm>
           <a:prstGeom prst="rect">
@@ -3596,7 +3576,7 @@
         </p:nvSpPr>
         <p:spPr>
           <a:xfrm>
-            <a:off x="360000" y="1382314"/>
+            <a:off x="360000" y="1234212"/>
             <a:ext cx="1008000" cy="289004"/>
           </a:xfrm>
           <a:prstGeom prst="rect">
@@ -3626,7 +3606,7 @@
         </p:nvSpPr>
         <p:spPr>
           <a:xfrm>
-            <a:off x="392400" y="1421914"/>
+            <a:off x="392400" y="1273812"/>
             <a:ext cx="115200" cy="209804"/>
           </a:xfrm>
           <a:prstGeom prst="rect">
@@ -3666,7 +3646,7 @@
         </p:nvSpPr>
         <p:spPr>
           <a:xfrm>
-            <a:off x="500400" y="1421914"/>
+            <a:off x="500400" y="1273812"/>
             <a:ext cx="835200" cy="209804"/>
           </a:xfrm>
           <a:prstGeom prst="rect">
@@ -3724,7 +3704,7 @@
         </p:nvSpPr>
         <p:spPr>
           <a:xfrm>
-            <a:off x="360000" y="1671318"/>
+            <a:off x="360000" y="1523216"/>
             <a:ext cx="1008000" cy="616410"/>
           </a:xfrm>
           <a:prstGeom prst="rect">
@@ -3754,7 +3734,7 @@
         </p:nvSpPr>
         <p:spPr>
           <a:xfrm>
-            <a:off x="392400" y="1927072"/>
+            <a:off x="392400" y="1778970"/>
             <a:ext cx="115200" cy="104902"/>
           </a:xfrm>
           <a:prstGeom prst="rect">
@@ -3794,7 +3774,7 @@
         </p:nvSpPr>
         <p:spPr>
           <a:xfrm>
-            <a:off x="500400" y="1927072"/>
+            <a:off x="500400" y="1778970"/>
             <a:ext cx="835200" cy="104902"/>
           </a:xfrm>
           <a:prstGeom prst="rect">
@@ -3834,7 +3814,7 @@
         </p:nvSpPr>
         <p:spPr>
           <a:xfrm>
-            <a:off x="360000" y="2287728"/>
+            <a:off x="360000" y="2139626"/>
             <a:ext cx="1008000" cy="498808"/>
           </a:xfrm>
           <a:prstGeom prst="rect">
@@ -3864,7 +3844,7 @@
         </p:nvSpPr>
         <p:spPr>
           <a:xfrm>
-            <a:off x="392400" y="2484681"/>
+            <a:off x="392400" y="2336579"/>
             <a:ext cx="115200" cy="104902"/>
           </a:xfrm>
           <a:prstGeom prst="rect">
@@ -3904,7 +3884,7 @@
         </p:nvSpPr>
         <p:spPr>
           <a:xfrm>
-            <a:off x="500400" y="2484681"/>
+            <a:off x="500400" y="2336579"/>
             <a:ext cx="835200" cy="104902"/>
           </a:xfrm>
           <a:prstGeom prst="rect">
@@ -3944,7 +3924,7 @@
         </p:nvSpPr>
         <p:spPr>
           <a:xfrm>
-            <a:off x="1368000" y="552306"/>
+            <a:off x="1368000" y="404204"/>
             <a:ext cx="1008000" cy="830008"/>
           </a:xfrm>
           <a:prstGeom prst="rect">
@@ -4010,7 +3990,7 @@
         </p:nvSpPr>
         <p:spPr>
           <a:xfrm>
-            <a:off x="1368000" y="1382314"/>
+            <a:off x="1368000" y="1234212"/>
             <a:ext cx="1008000" cy="289004"/>
           </a:xfrm>
           <a:prstGeom prst="rect">
@@ -4058,7 +4038,7 @@
         </p:nvSpPr>
         <p:spPr>
           <a:xfrm>
-            <a:off x="1368000" y="1671318"/>
+            <a:off x="1368000" y="1523216"/>
             <a:ext cx="1008000" cy="616410"/>
           </a:xfrm>
           <a:prstGeom prst="rect">
@@ -4182,7 +4162,7 @@
         </p:nvSpPr>
         <p:spPr>
           <a:xfrm>
-            <a:off x="1368000" y="2287728"/>
+            <a:off x="1368000" y="2139626"/>
             <a:ext cx="1008000" cy="498808"/>
           </a:xfrm>
           <a:prstGeom prst="rect">
@@ -4284,7 +4264,7 @@
         </p:nvSpPr>
         <p:spPr>
           <a:xfrm>
-            <a:off x="2448000" y="581106"/>
+            <a:off x="2448000" y="433004"/>
             <a:ext cx="50400" cy="772408"/>
           </a:xfrm>
           <a:custGeom>
@@ -4334,7 +4314,7 @@
         </p:nvSpPr>
         <p:spPr>
           <a:xfrm>
-            <a:off x="2498400" y="967310"/>
+            <a:off x="2498400" y="819208"/>
             <a:ext cx="50400" cy="0"/>
           </a:xfrm>
           <a:custGeom>
@@ -4378,7 +4358,7 @@
         </p:nvSpPr>
         <p:spPr>
           <a:xfrm>
-            <a:off x="2570400" y="750306"/>
+            <a:off x="2570400" y="602204"/>
             <a:ext cx="590400" cy="434008"/>
           </a:xfrm>
           <a:prstGeom prst="rect">
@@ -4471,7 +4451,7 @@
         </p:nvSpPr>
         <p:spPr>
           <a:xfrm>
-            <a:off x="2448000" y="1411114"/>
+            <a:off x="2448000" y="1263012"/>
             <a:ext cx="50400" cy="231404"/>
           </a:xfrm>
           <a:custGeom>
@@ -4521,7 +4501,7 @@
         </p:nvSpPr>
         <p:spPr>
           <a:xfrm>
-            <a:off x="2498400" y="1526816"/>
+            <a:off x="2498400" y="1378714"/>
             <a:ext cx="50400" cy="0"/>
           </a:xfrm>
           <a:custGeom>
@@ -4565,7 +4545,7 @@
         </p:nvSpPr>
         <p:spPr>
           <a:xfrm>
-            <a:off x="2570400" y="1414714"/>
+            <a:off x="2570400" y="1266612"/>
             <a:ext cx="590400" cy="224204"/>
           </a:xfrm>
           <a:prstGeom prst="rect">
@@ -4623,7 +4603,7 @@
         </p:nvSpPr>
         <p:spPr>
           <a:xfrm>
-            <a:off x="2448000" y="1700118"/>
+            <a:off x="2448000" y="1552016"/>
             <a:ext cx="50400" cy="558810"/>
           </a:xfrm>
           <a:custGeom>
@@ -4673,7 +4653,7 @@
         </p:nvSpPr>
         <p:spPr>
           <a:xfrm>
-            <a:off x="2498400" y="1979523"/>
+            <a:off x="2498400" y="1831421"/>
             <a:ext cx="50400" cy="0"/>
           </a:xfrm>
           <a:custGeom>
@@ -4717,7 +4697,7 @@
         </p:nvSpPr>
         <p:spPr>
           <a:xfrm>
-            <a:off x="2570400" y="1919872"/>
+            <a:off x="2570400" y="1771770"/>
             <a:ext cx="590400" cy="119302"/>
           </a:xfrm>
           <a:prstGeom prst="rect">
@@ -4757,7 +4737,7 @@
         </p:nvSpPr>
         <p:spPr>
           <a:xfrm>
-            <a:off x="2448000" y="2316528"/>
+            <a:off x="2448000" y="2168426"/>
             <a:ext cx="50400" cy="441208"/>
           </a:xfrm>
           <a:custGeom>
@@ -4807,7 +4787,7 @@
         </p:nvSpPr>
         <p:spPr>
           <a:xfrm>
-            <a:off x="2498400" y="2537132"/>
+            <a:off x="2498400" y="2389030"/>
             <a:ext cx="50400" cy="0"/>
           </a:xfrm>
           <a:custGeom>
@@ -4851,7 +4831,7 @@
         </p:nvSpPr>
         <p:spPr>
           <a:xfrm>
-            <a:off x="2570400" y="2477481"/>
+            <a:off x="2570400" y="2329379"/>
             <a:ext cx="590400" cy="119302"/>
           </a:xfrm>
           <a:prstGeom prst="rect">
@@ -4891,7 +4871,7 @@
         </p:nvSpPr>
         <p:spPr>
           <a:xfrm>
-            <a:off x="3204000" y="581106"/>
+            <a:off x="3204000" y="433004"/>
             <a:ext cx="50400" cy="1061412"/>
           </a:xfrm>
           <a:custGeom>
@@ -4941,7 +4921,7 @@
         </p:nvSpPr>
         <p:spPr>
           <a:xfrm>
-            <a:off x="3254400" y="1111812"/>
+            <a:off x="3254400" y="963710"/>
             <a:ext cx="50400" cy="0"/>
           </a:xfrm>
           <a:custGeom>
@@ -4985,7 +4965,7 @@
         </p:nvSpPr>
         <p:spPr>
           <a:xfrm>
-            <a:off x="3326400" y="999710"/>
+            <a:off x="3326400" y="851608"/>
             <a:ext cx="590400" cy="224204"/>
           </a:xfrm>
           <a:prstGeom prst="rect">
@@ -5042,7 +5022,7 @@
         </p:nvSpPr>
         <p:spPr>
           <a:xfrm>
-            <a:off x="3247200" y="1752221"/>
+            <a:off x="3247200" y="1748621"/>
             <a:ext cx="684000" cy="165600"/>
           </a:xfrm>
           <a:prstGeom prst="roundRect">
@@ -5092,8 +5072,8 @@
         </p:nvSpPr>
         <p:spPr>
           <a:xfrm>
-            <a:off x="2376000" y="1671318"/>
-            <a:ext cx="1213200" cy="80903"/>
+            <a:off x="2376000" y="1523216"/>
+            <a:ext cx="1213200" cy="225405"/>
           </a:xfrm>
           <a:custGeom>
             <a:avLst/>
@@ -5102,7 +5082,7 @@
             <a:cxnLst/>
             <a:rect l="l" t="t" r="r" b="b"/>
             <a:pathLst>
-              <a:path w="1213200" h="80903">
+              <a:path w="1213200" h="225405">
                 <a:moveTo>
                   <a:pt x="0" y="0"/>
                 </a:moveTo>
@@ -5110,7 +5090,7 @@
                   <a:pt x="1213200" y="0"/>
                 </a:lnTo>
                 <a:lnTo>
-                  <a:pt x="1213200" y="80903"/>
+                  <a:pt x="1213200" y="225405"/>
                 </a:lnTo>
               </a:path>
             </a:pathLst>
@@ -5141,7 +5121,7 @@
         </p:nvSpPr>
         <p:spPr>
           <a:xfrm>
-            <a:off x="2570400" y="1696518"/>
+            <a:off x="2570400" y="1548416"/>
             <a:ext cx="658800" cy="223200"/>
           </a:xfrm>
           <a:prstGeom prst="rect">
@@ -5199,8 +5179,8 @@
         </p:nvSpPr>
         <p:spPr>
           <a:xfrm>
-            <a:off x="108000" y="72000"/>
-            <a:ext cx="3481200" cy="2829736"/>
+            <a:off x="108000" y="310604"/>
+            <a:ext cx="3481200" cy="2443030"/>
           </a:xfrm>
           <a:custGeom>
             <a:avLst/>
@@ -5209,15 +5189,15 @@
             <a:cxnLst/>
             <a:rect l="l" t="t" r="r" b="b"/>
             <a:pathLst>
-              <a:path w="3481200" h="2829736">
+              <a:path w="3481200" h="2443030">
                 <a:moveTo>
-                  <a:pt x="3481200" y="1845821"/>
+                  <a:pt x="3481200" y="1603617"/>
                 </a:moveTo>
                 <a:lnTo>
-                  <a:pt x="3481200" y="2829736"/>
+                  <a:pt x="3481200" y="2443030"/>
                 </a:lnTo>
                 <a:lnTo>
-                  <a:pt x="0" y="2829736"/>
+                  <a:pt x="0" y="2443030"/>
                 </a:lnTo>
                 <a:lnTo>
                   <a:pt x="0" y="0"/>
@@ -5254,7 +5234,7 @@
         </p:nvSpPr>
         <p:spPr>
           <a:xfrm>
-            <a:off x="2808000" y="2923336"/>
+            <a:off x="2808000" y="2775234"/>
             <a:ext cx="1108800" cy="129600"/>
           </a:xfrm>
           <a:prstGeom prst="rect">
@@ -5294,7 +5274,7 @@
         </p:nvSpPr>
         <p:spPr>
           <a:xfrm>
-            <a:off x="244800" y="7200"/>
+            <a:off x="244800" y="245804"/>
             <a:ext cx="1080000" cy="129600"/>
           </a:xfrm>
           <a:prstGeom prst="rect">
@@ -5334,8 +5314,8 @@
         </p:nvSpPr>
         <p:spPr>
           <a:xfrm>
-            <a:off x="252000" y="140400"/>
-            <a:ext cx="0" cy="1839123"/>
+            <a:off x="252000" y="379004"/>
+            <a:ext cx="0" cy="1452417"/>
           </a:xfrm>
           <a:custGeom>
             <a:avLst/>
@@ -5344,12 +5324,12 @@
             <a:cxnLst/>
             <a:rect l="l" t="t" r="r" b="b"/>
             <a:pathLst>
-              <a:path w="0" h="1839123">
+              <a:path w="0" h="1452417">
                 <a:moveTo>
                   <a:pt x="0" y="0"/>
                 </a:moveTo>
                 <a:lnTo>
-                  <a:pt x="0" y="1839123"/>
+                  <a:pt x="0" y="1452417"/>
                 </a:lnTo>
               </a:path>
             </a:pathLst>
@@ -5379,7 +5359,7 @@
         </p:nvSpPr>
         <p:spPr>
           <a:xfrm>
-            <a:off x="252000" y="696808"/>
+            <a:off x="252000" y="548706"/>
             <a:ext cx="108000" cy="0"/>
           </a:xfrm>
           <a:custGeom>
@@ -5425,7 +5405,7 @@
         </p:nvSpPr>
         <p:spPr>
           <a:xfrm>
-            <a:off x="252000" y="967310"/>
+            <a:off x="252000" y="819208"/>
             <a:ext cx="108000" cy="0"/>
           </a:xfrm>
           <a:custGeom>
@@ -5471,7 +5451,7 @@
         </p:nvSpPr>
         <p:spPr>
           <a:xfrm>
-            <a:off x="252000" y="1237812"/>
+            <a:off x="252000" y="1089710"/>
             <a:ext cx="108000" cy="0"/>
           </a:xfrm>
           <a:custGeom>
@@ -5517,7 +5497,7 @@
         </p:nvSpPr>
         <p:spPr>
           <a:xfrm>
-            <a:off x="252000" y="1526816"/>
+            <a:off x="252000" y="1378714"/>
             <a:ext cx="108000" cy="0"/>
           </a:xfrm>
           <a:custGeom>
@@ -5563,7 +5543,7 @@
         </p:nvSpPr>
         <p:spPr>
           <a:xfrm>
-            <a:off x="252000" y="1979523"/>
+            <a:off x="252000" y="1831421"/>
             <a:ext cx="108000" cy="0"/>
           </a:xfrm>
           <a:custGeom>
